--- a/week14/Lecture14.pptx
+++ b/week14/Lecture14.pptx
@@ -218,7 +218,7 @@
           <a:p>
             <a:fld id="{634F3F22-B4BB-3F48-9180-464A9F2D66D1}" type="datetimeFigureOut">
               <a:rPr kumimoji="1" lang="zh-CN" altLang="en-US" smtClean="0"/>
-              <a:t>2025/5/27</a:t>
+              <a:t>2026/5/25</a:t>
             </a:fld>
             <a:endParaRPr kumimoji="1" lang="zh-CN" altLang="en-US"/>
           </a:p>
@@ -698,7 +698,7 @@
           <a:p>
             <a:fld id="{FC19A4FA-3D9A-4114-B0D5-759CBD56F1AB}" type="datetimeFigureOut">
               <a:rPr lang="zh-CN" altLang="en-US" smtClean="0"/>
-              <a:t>2025/5/27</a:t>
+              <a:t>2026/5/25</a:t>
             </a:fld>
             <a:endParaRPr lang="zh-CN" altLang="en-US"/>
           </a:p>
@@ -901,7 +901,7 @@
           <a:p>
             <a:fld id="{FC19A4FA-3D9A-4114-B0D5-759CBD56F1AB}" type="datetimeFigureOut">
               <a:rPr lang="zh-CN" altLang="en-US" smtClean="0"/>
-              <a:t>2025/5/27</a:t>
+              <a:t>2026/5/25</a:t>
             </a:fld>
             <a:endParaRPr lang="zh-CN" altLang="en-US"/>
           </a:p>
@@ -1079,7 +1079,7 @@
           <a:p>
             <a:fld id="{FC19A4FA-3D9A-4114-B0D5-759CBD56F1AB}" type="datetimeFigureOut">
               <a:rPr lang="zh-CN" altLang="en-US" smtClean="0"/>
-              <a:t>2025/5/27</a:t>
+              <a:t>2026/5/25</a:t>
             </a:fld>
             <a:endParaRPr lang="zh-CN" altLang="en-US"/>
           </a:p>
@@ -1303,7 +1303,7 @@
           <a:p>
             <a:fld id="{FC19A4FA-3D9A-4114-B0D5-759CBD56F1AB}" type="datetimeFigureOut">
               <a:rPr lang="zh-CN" altLang="en-US" smtClean="0"/>
-              <a:t>2025/5/27</a:t>
+              <a:t>2026/5/25</a:t>
             </a:fld>
             <a:endParaRPr lang="zh-CN" altLang="en-US"/>
           </a:p>
@@ -1537,7 +1537,7 @@
           <a:p>
             <a:fld id="{FC19A4FA-3D9A-4114-B0D5-759CBD56F1AB}" type="datetimeFigureOut">
               <a:rPr lang="zh-CN" altLang="en-US" smtClean="0"/>
-              <a:t>2025/5/27</a:t>
+              <a:t>2026/5/25</a:t>
             </a:fld>
             <a:endParaRPr lang="zh-CN" altLang="en-US"/>
           </a:p>
@@ -1936,7 +1936,7 @@
           <a:p>
             <a:fld id="{FC19A4FA-3D9A-4114-B0D5-759CBD56F1AB}" type="datetimeFigureOut">
               <a:rPr lang="zh-CN" altLang="en-US" smtClean="0"/>
-              <a:t>2025/5/27</a:t>
+              <a:t>2026/5/25</a:t>
             </a:fld>
             <a:endParaRPr lang="zh-CN" altLang="en-US"/>
           </a:p>
@@ -2216,7 +2216,7 @@
           <a:p>
             <a:fld id="{FC19A4FA-3D9A-4114-B0D5-759CBD56F1AB}" type="datetimeFigureOut">
               <a:rPr lang="zh-CN" altLang="en-US" smtClean="0"/>
-              <a:t>2025/5/27</a:t>
+              <a:t>2026/5/25</a:t>
             </a:fld>
             <a:endParaRPr lang="zh-CN" altLang="en-US"/>
           </a:p>
@@ -2368,7 +2368,7 @@
           <a:p>
             <a:fld id="{FC19A4FA-3D9A-4114-B0D5-759CBD56F1AB}" type="datetimeFigureOut">
               <a:rPr lang="zh-CN" altLang="en-US" smtClean="0"/>
-              <a:t>2025/5/27</a:t>
+              <a:t>2026/5/25</a:t>
             </a:fld>
             <a:endParaRPr lang="zh-CN" altLang="en-US"/>
           </a:p>
@@ -2498,7 +2498,7 @@
           <a:p>
             <a:fld id="{FC19A4FA-3D9A-4114-B0D5-759CBD56F1AB}" type="datetimeFigureOut">
               <a:rPr lang="zh-CN" altLang="en-US" smtClean="0"/>
-              <a:t>2025/5/27</a:t>
+              <a:t>2026/5/25</a:t>
             </a:fld>
             <a:endParaRPr lang="zh-CN" altLang="en-US"/>
           </a:p>
@@ -2808,7 +2808,7 @@
           <a:p>
             <a:fld id="{FC19A4FA-3D9A-4114-B0D5-759CBD56F1AB}" type="datetimeFigureOut">
               <a:rPr lang="zh-CN" altLang="en-US" smtClean="0"/>
-              <a:t>2025/5/27</a:t>
+              <a:t>2026/5/25</a:t>
             </a:fld>
             <a:endParaRPr lang="zh-CN" altLang="en-US"/>
           </a:p>
@@ -3095,7 +3095,7 @@
           <a:p>
             <a:fld id="{FC19A4FA-3D9A-4114-B0D5-759CBD56F1AB}" type="datetimeFigureOut">
               <a:rPr lang="zh-CN" altLang="en-US" smtClean="0"/>
-              <a:t>2025/5/27</a:t>
+              <a:t>2026/5/25</a:t>
             </a:fld>
             <a:endParaRPr lang="zh-CN" altLang="en-US"/>
           </a:p>
@@ -3388,7 +3388,7 @@
           <a:p>
             <a:fld id="{FC19A4FA-3D9A-4114-B0D5-759CBD56F1AB}" type="datetimeFigureOut">
               <a:rPr lang="zh-CN" altLang="en-US" smtClean="0"/>
-              <a:t>2025/5/27</a:t>
+              <a:t>2026/5/25</a:t>
             </a:fld>
             <a:endParaRPr lang="zh-CN" altLang="en-US"/>
           </a:p>
@@ -11790,7 +11790,7 @@
               <a:t>nothrow</a:t>
             </a:r>
             <a:r>
-              <a:rPr lang="en" altLang="zh-CN" dirty="0">
+              <a:rPr lang="en" altLang="zh-CN">
                 <a:solidFill>
                   <a:srgbClr val="0000CC"/>
                 </a:solidFill>
@@ -13914,13 +13914,13 @@
           <p:nvPr/>
         </p:nvPicPr>
         <p:blipFill>
-          <a:blip r:embed="rId2">
+          <a:blip>
             <a:extLst>
               <a:ext uri="{28A0092B-C50C-407E-A947-70E740481C1C}">
                 <a14:useLocalDpi xmlns:a14="http://schemas.microsoft.com/office/drawing/2010/main" val="0"/>
               </a:ext>
               <a:ext uri="{96DAC541-7B7A-43D3-8B79-37D633B846F1}">
-                <asvg:svgBlip xmlns:asvg="http://schemas.microsoft.com/office/drawing/2016/SVG/main" r:embed="rId3"/>
+                <asvg:svgBlip xmlns:asvg="http://schemas.microsoft.com/office/drawing/2016/SVG/main" r:embed="rId2"/>
               </a:ext>
             </a:extLst>
           </a:blip>
